--- a/docs/2026-03-31/geuldobi-pipeline-compact-human-brief-draft_(2차).pptx
+++ b/docs/2026-03-31/geuldobi-pipeline-compact-human-brief-draft_(2차).pptx
@@ -2934,9 +2934,6 @@
           <a:bodyPr wrap="square" lIns="508" tIns="508" rIns="508" bIns="508" rtlCol="0" anchor="ctr"/>
           <a:lstStyle/>
           <a:p>
-            <a:pPr marL="0" indent="0" algn="l">
-              <a:buNone/>
-            </a:pPr>
             <a:r>
               <a:rPr lang="en-US" sz="1100" b="1" dirty="0" err="1" smtClean="0">
                 <a:solidFill>
@@ -2968,9 +2965,71 @@
                 <a:ea typeface="Malgun Gothic" pitchFamily="34" charset="-122"/>
                 <a:cs typeface="Malgun Gothic" pitchFamily="34" charset="-120"/>
               </a:rPr>
-              <a:t>단순 직렬 파이프라인이 아니라, 각 stage마다 판정 게이트와 수정 경로가 붙어 있는 계층형 운영 구조다.</a:t>
-            </a:r>
-            <a:endParaRPr lang="en-US" sz="1100" dirty="0"/>
+              <a:t>단순 직렬 파이프라인이 아니라, 각 stage마다 판정 게이트와 수정 경로가 붙어 있는 계층형 운영 </a:t>
+            </a:r>
+            <a:r>
+              <a:rPr lang="en-US" sz="1100" b="1" dirty="0" err="1">
+                <a:solidFill>
+                  <a:srgbClr val="17324D"/>
+                </a:solidFill>
+                <a:latin typeface="Malgun Gothic" pitchFamily="34" charset="0"/>
+                <a:ea typeface="Malgun Gothic" pitchFamily="34" charset="-122"/>
+                <a:cs typeface="Malgun Gothic" pitchFamily="34" charset="-120"/>
+              </a:rPr>
+              <a:t>구조다</a:t>
+            </a:r>
+            <a:r>
+              <a:rPr lang="en-US" sz="1100" b="1" dirty="0" smtClean="0">
+                <a:solidFill>
+                  <a:srgbClr val="17324D"/>
+                </a:solidFill>
+                <a:latin typeface="Malgun Gothic" pitchFamily="34" charset="0"/>
+                <a:ea typeface="Malgun Gothic" pitchFamily="34" charset="-122"/>
+                <a:cs typeface="Malgun Gothic" pitchFamily="34" charset="-120"/>
+              </a:rPr>
+              <a:t>. (</a:t>
+            </a:r>
+            <a:r>
+              <a:rPr lang="ko-KR" altLang="en-US" sz="1100" dirty="0" err="1"/>
+              <a:t>스켈레톤</a:t>
+            </a:r>
+            <a:r>
+              <a:rPr lang="ko-KR" altLang="en-US" sz="1100" dirty="0"/>
+              <a:t> </a:t>
+            </a:r>
+            <a:r>
+              <a:rPr lang="en-US" altLang="ko-KR" sz="1100" dirty="0"/>
+              <a:t>-&gt; </a:t>
+            </a:r>
+            <a:r>
+              <a:rPr lang="ko-KR" altLang="en-US" sz="1100" dirty="0"/>
+              <a:t>구체화 </a:t>
+            </a:r>
+            <a:r>
+              <a:rPr lang="en-US" altLang="ko-KR" sz="1100" dirty="0"/>
+              <a:t>-&gt; </a:t>
+            </a:r>
+            <a:r>
+              <a:rPr lang="ko-KR" altLang="en-US" sz="1100" dirty="0" err="1"/>
+              <a:t>스켈레톤</a:t>
+            </a:r>
+            <a:r>
+              <a:rPr lang="ko-KR" altLang="en-US" sz="1100" dirty="0"/>
+              <a:t> </a:t>
+            </a:r>
+            <a:r>
+              <a:rPr lang="en-US" altLang="ko-KR" sz="1100" dirty="0"/>
+              <a:t>-&gt; </a:t>
+            </a:r>
+            <a:r>
+              <a:rPr lang="ko-KR" altLang="en-US" sz="1100" dirty="0" smtClean="0"/>
+              <a:t>구체화</a:t>
+            </a:r>
+            <a:r>
+              <a:rPr lang="en-US" altLang="ko-KR" sz="1100" dirty="0"/>
+              <a:t>)</a:t>
+            </a:r>
+            <a:endParaRPr lang="ko-KR" altLang="en-US" sz="1100" dirty="0"/>
           </a:p>
         </p:txBody>
       </p:sp>
